--- a/PRUEBAS DE SOFTWARE/clase_9/S9_Presentacion_Estudiante.pptx
+++ b/PRUEBAS DE SOFTWARE/clase_9/S9_Presentacion_Estudiante.pptx
@@ -32083,7 +32083,7 @@
         </p:nvSpPr>
         <p:spPr>
           <a:xfrm>
-            <a:off x="0" y="0"/>
+            <a:off x="53788" y="6724"/>
             <a:ext cx="9144000" cy="868680"/>
           </a:xfrm>
           <a:prstGeom prst="rect">
@@ -32894,7 +32894,7 @@
           <a:bodyPr/>
           <a:lstStyle/>
           <a:p>
-            <a:endParaRPr lang="es-CO"/>
+            <a:endParaRPr lang="es-CO" dirty="0"/>
           </a:p>
         </p:txBody>
       </p:sp>
